--- a/docs/_static/image_sources/genai-serving-graph.pptx
+++ b/docs/_static/image_sources/genai-serving-graph.pptx
@@ -6,13 +6,12 @@
     <p:sldMasterId id="2147483864" r:id="rId2"/>
   </p:sldMasterIdLst>
   <p:sldIdLst>
-    <p:sldId id="256" r:id="rId3"/>
-    <p:sldId id="257" r:id="rId4"/>
+    <p:sldId id="257" r:id="rId3"/>
   </p:sldIdLst>
   <p:sldSz cx="12192000" cy="6858000"/>
   <p:notesSz cx="7102475" cy="9388475"/>
   <p:custDataLst>
-    <p:tags r:id="rId5"/>
+    <p:tags r:id="rId4"/>
   </p:custDataLst>
   <p:defaultTextStyle>
     <a:defPPr>
@@ -33709,136 +33708,6 @@
       </p:grpSpPr>
       <p:sp>
         <p:nvSpPr>
-          <p:cNvPr id="2" name="Picture Placeholder 1">
-            <a:extLst>
-              <a:ext uri="{FF2B5EF4-FFF2-40B4-BE49-F238E27FC236}">
-                <a16:creationId xmlns:a16="http://schemas.microsoft.com/office/drawing/2014/main" id="{B7EA905A-4996-6BAF-8762-57BAA0F632F6}"/>
-              </a:ext>
-            </a:extLst>
-          </p:cNvPr>
-          <p:cNvSpPr>
-            <a:spLocks noGrp="1"/>
-          </p:cNvSpPr>
-          <p:nvPr>
-            <p:ph type="pic" sz="quarter" idx="14"/>
-          </p:nvPr>
-        </p:nvSpPr>
-        <p:spPr/>
-        <p:txBody>
-          <a:bodyPr/>
-          <a:lstStyle/>
-          <a:p>
-            <a:endParaRPr lang="en-IL"/>
-          </a:p>
-        </p:txBody>
-      </p:sp>
-      <p:sp>
-        <p:nvSpPr>
-          <p:cNvPr id="3" name="Text Placeholder 2">
-            <a:extLst>
-              <a:ext uri="{FF2B5EF4-FFF2-40B4-BE49-F238E27FC236}">
-                <a16:creationId xmlns:a16="http://schemas.microsoft.com/office/drawing/2014/main" id="{D6760337-EE39-0A30-6A11-F4C742F11751}"/>
-              </a:ext>
-            </a:extLst>
-          </p:cNvPr>
-          <p:cNvSpPr>
-            <a:spLocks noGrp="1"/>
-          </p:cNvSpPr>
-          <p:nvPr>
-            <p:ph type="body" sz="quarter" idx="13"/>
-          </p:nvPr>
-        </p:nvSpPr>
-        <p:spPr/>
-        <p:txBody>
-          <a:bodyPr/>
-          <a:lstStyle/>
-          <a:p>
-            <a:endParaRPr lang="en-IL"/>
-          </a:p>
-        </p:txBody>
-      </p:sp>
-      <p:sp>
-        <p:nvSpPr>
-          <p:cNvPr id="4" name="Subtitle 3">
-            <a:extLst>
-              <a:ext uri="{FF2B5EF4-FFF2-40B4-BE49-F238E27FC236}">
-                <a16:creationId xmlns:a16="http://schemas.microsoft.com/office/drawing/2014/main" id="{BE9A63F8-BB23-28B1-CD89-9B1CB15810F5}"/>
-              </a:ext>
-            </a:extLst>
-          </p:cNvPr>
-          <p:cNvSpPr>
-            <a:spLocks noGrp="1"/>
-          </p:cNvSpPr>
-          <p:nvPr>
-            <p:ph type="subTitle" idx="1"/>
-          </p:nvPr>
-        </p:nvSpPr>
-        <p:spPr/>
-        <p:txBody>
-          <a:bodyPr/>
-          <a:lstStyle/>
-          <a:p>
-            <a:endParaRPr lang="en-IL"/>
-          </a:p>
-        </p:txBody>
-      </p:sp>
-      <p:sp>
-        <p:nvSpPr>
-          <p:cNvPr id="5" name="Title 4">
-            <a:extLst>
-              <a:ext uri="{FF2B5EF4-FFF2-40B4-BE49-F238E27FC236}">
-                <a16:creationId xmlns:a16="http://schemas.microsoft.com/office/drawing/2014/main" id="{A0E0BA5A-4150-304F-5961-47CE7C1DA89B}"/>
-              </a:ext>
-            </a:extLst>
-          </p:cNvPr>
-          <p:cNvSpPr>
-            <a:spLocks noGrp="1"/>
-          </p:cNvSpPr>
-          <p:nvPr>
-            <p:ph type="title"/>
-          </p:nvPr>
-        </p:nvSpPr>
-        <p:spPr/>
-        <p:txBody>
-          <a:bodyPr/>
-          <a:lstStyle/>
-          <a:p>
-            <a:endParaRPr lang="en-IL"/>
-          </a:p>
-        </p:txBody>
-      </p:sp>
-    </p:spTree>
-    <p:extLst>
-      <p:ext uri="{BB962C8B-B14F-4D97-AF65-F5344CB8AC3E}">
-        <p14:creationId xmlns:p14="http://schemas.microsoft.com/office/powerpoint/2010/main" val="493148220"/>
-      </p:ext>
-    </p:extLst>
-  </p:cSld>
-  <p:clrMapOvr>
-    <a:masterClrMapping/>
-  </p:clrMapOvr>
-</p:sld>
-</file>
-
-<file path=ppt/slides/slide2.xml><?xml version="1.0" encoding="utf-8"?>
-<p:sld xmlns:a="http://schemas.openxmlformats.org/drawingml/2006/main" xmlns:r="http://schemas.openxmlformats.org/officeDocument/2006/relationships" xmlns:p="http://schemas.openxmlformats.org/presentationml/2006/main">
-  <p:cSld>
-    <p:spTree>
-      <p:nvGrpSpPr>
-        <p:cNvPr id="1" name=""/>
-        <p:cNvGrpSpPr/>
-        <p:nvPr/>
-      </p:nvGrpSpPr>
-      <p:grpSpPr>
-        <a:xfrm>
-          <a:off x="0" y="0"/>
-          <a:ext cx="0" cy="0"/>
-          <a:chOff x="0" y="0"/>
-          <a:chExt cx="0" cy="0"/>
-        </a:xfrm>
-      </p:grpSpPr>
-      <p:sp>
-        <p:nvSpPr>
           <p:cNvPr id="3" name="Oval 2">
             <a:extLst>
               <a:ext uri="{FF2B5EF4-FFF2-40B4-BE49-F238E27FC236}">
@@ -33851,7 +33720,7 @@
         </p:nvSpPr>
         <p:spPr>
           <a:xfrm>
-            <a:off x="4670230" y="240481"/>
+            <a:off x="4936049" y="240481"/>
             <a:ext cx="1702676" cy="842407"/>
           </a:xfrm>
           <a:prstGeom prst="ellipse">
@@ -33920,7 +33789,7 @@
         </p:nvSpPr>
         <p:spPr>
           <a:xfrm>
-            <a:off x="5458506" y="546859"/>
+            <a:off x="5724325" y="546859"/>
             <a:ext cx="126124" cy="45719"/>
           </a:xfrm>
           <a:prstGeom prst="rect">
@@ -33967,7 +33836,7 @@
         </p:nvSpPr>
         <p:spPr>
           <a:xfrm>
-            <a:off x="4389119" y="1519312"/>
+            <a:off x="4644305" y="1519312"/>
             <a:ext cx="2264898" cy="829993"/>
           </a:xfrm>
           <a:prstGeom prst="rect">
@@ -34035,9 +33904,9 @@
           <p:nvPr/>
         </p:nvSpPr>
         <p:spPr>
-          <a:xfrm>
-            <a:off x="5521568" y="1828801"/>
-            <a:ext cx="0" cy="0"/>
+          <a:xfrm flipH="1">
+            <a:off x="5731035" y="1658673"/>
+            <a:ext cx="45719" cy="84080"/>
           </a:xfrm>
           <a:prstGeom prst="rect">
             <a:avLst/>
@@ -34064,7 +33933,14 @@
             </a:pPr>
             <a:r>
               <a:rPr lang="en-IL" sz="1600" dirty="0"/>
-              <a:t>Classifier</a:t>
+              <a:t>Classifier template:</a:t>
+            </a:r>
+            <a:br>
+              <a:rPr lang="en-IL" sz="1600" dirty="0"/>
+            </a:br>
+            <a:r>
+              <a:rPr lang="en-IL" sz="1600" dirty="0"/>
+              <a:t>understand intention</a:t>
             </a:r>
           </a:p>
         </p:txBody>
@@ -34083,7 +33959,7 @@
         </p:nvSpPr>
         <p:spPr>
           <a:xfrm>
-            <a:off x="4121834" y="3094893"/>
+            <a:off x="4387653" y="3094893"/>
             <a:ext cx="2771332" cy="1950155"/>
           </a:xfrm>
           <a:prstGeom prst="diamond">
@@ -34152,7 +34028,7 @@
         </p:nvSpPr>
         <p:spPr>
           <a:xfrm>
-            <a:off x="5460123" y="3896750"/>
+            <a:off x="5725942" y="3896750"/>
             <a:ext cx="94755" cy="182881"/>
           </a:xfrm>
           <a:prstGeom prst="rect">
@@ -34440,7 +34316,7 @@
             </a:br>
             <a:r>
               <a:rPr lang="en-IL" sz="1600" dirty="0"/>
-              <a:t>description of issue</a:t>
+              <a:t>description of problem</a:t>
             </a:r>
           </a:p>
         </p:txBody>
@@ -34610,7 +34486,7 @@
             </a:br>
             <a:r>
               <a:rPr lang="en-IL" sz="1600" dirty="0"/>
-              <a:t>for issue</a:t>
+              <a:t>for problem</a:t>
             </a:r>
           </a:p>
         </p:txBody>
@@ -34754,7 +34630,7 @@
         </p:nvCxnSpPr>
         <p:spPr>
           <a:xfrm>
-            <a:off x="5521568" y="1082888"/>
+            <a:off x="5787387" y="1082888"/>
             <a:ext cx="0" cy="436424"/>
           </a:xfrm>
           <a:prstGeom prst="straightConnector1">
@@ -34800,7 +34676,7 @@
         </p:nvCxnSpPr>
         <p:spPr>
           <a:xfrm>
-            <a:off x="5497880" y="2349305"/>
+            <a:off x="5763699" y="2349305"/>
             <a:ext cx="9620" cy="745588"/>
           </a:xfrm>
           <a:prstGeom prst="straightConnector1">
@@ -34847,8 +34723,8 @@
         </p:nvCxnSpPr>
         <p:spPr>
           <a:xfrm flipV="1">
-            <a:off x="6893166" y="4065565"/>
-            <a:ext cx="2600181" cy="4406"/>
+            <a:off x="7158985" y="4065565"/>
+            <a:ext cx="2334362" cy="4406"/>
           </a:xfrm>
           <a:prstGeom prst="straightConnector1">
             <a:avLst/>
@@ -34895,7 +34771,7 @@
         <p:spPr>
           <a:xfrm flipH="1" flipV="1">
             <a:off x="2541557" y="4069082"/>
-            <a:ext cx="1580277" cy="889"/>
+            <a:ext cx="1846096" cy="889"/>
           </a:xfrm>
           <a:prstGeom prst="straightConnector1">
             <a:avLst/>
@@ -35028,7 +34904,7 @@
         </p:nvSpPr>
         <p:spPr>
           <a:xfrm>
-            <a:off x="6667133" y="3479542"/>
+            <a:off x="6815989" y="3459187"/>
             <a:ext cx="2820886" cy="215444"/>
           </a:xfrm>
           <a:prstGeom prst="rect">
@@ -35257,8 +35133,8 @@
         </p:nvSpPr>
         <p:spPr>
           <a:xfrm>
-            <a:off x="2710066" y="3388489"/>
-            <a:ext cx="1411768" cy="430887"/>
+            <a:off x="2710066" y="3399122"/>
+            <a:ext cx="1944872" cy="215444"/>
           </a:xfrm>
           <a:prstGeom prst="rect">
             <a:avLst/>
@@ -35422,14 +35298,7 @@
           <a:p>
             <a:r>
               <a:rPr lang="en-US" sz="1400" dirty="0"/>
-              <a:t>Customer has a </a:t>
-            </a:r>
-            <a:br>
-              <a:rPr lang="en-US" sz="1400" dirty="0"/>
-            </a:br>
-            <a:r>
-              <a:rPr lang="en-US" sz="1400" dirty="0"/>
-              <a:t>problem</a:t>
+              <a:t>Customer has a problem</a:t>
             </a:r>
             <a:endParaRPr lang="en-IL" sz="1400" dirty="0"/>
           </a:p>
@@ -35451,6 +35320,7 @@
 <file path=ppt/tags/tag1.xml><?xml version="1.0" encoding="utf-8"?>
 <p:tagLst xmlns:a="http://schemas.openxmlformats.org/drawingml/2006/main" xmlns:r="http://schemas.openxmlformats.org/officeDocument/2006/relationships" xmlns:p="http://schemas.openxmlformats.org/presentationml/2006/main">
   <p:tag name="NEWVI" val="true"/>
+  <p:tag name="LINKEDPICTURESLINKREMOVED" val="True"/>
 </p:tagLst>
 </file>
 

--- a/docs/_static/image_sources/genai-serving-graph.pptx
+++ b/docs/_static/image_sources/genai-serving-graph.pptx
@@ -33720,7 +33720,7 @@
         </p:nvSpPr>
         <p:spPr>
           <a:xfrm>
-            <a:off x="4936049" y="240481"/>
+            <a:off x="2541557" y="995222"/>
             <a:ext cx="1702676" cy="842407"/>
           </a:xfrm>
           <a:prstGeom prst="ellipse">
@@ -33789,7 +33789,7 @@
         </p:nvSpPr>
         <p:spPr>
           <a:xfrm>
-            <a:off x="5724325" y="546859"/>
+            <a:off x="3329833" y="1301600"/>
             <a:ext cx="126124" cy="45719"/>
           </a:xfrm>
           <a:prstGeom prst="rect">
@@ -33816,7 +33816,7 @@
               <a:buNone/>
             </a:pPr>
             <a:r>
-              <a:rPr lang="en-IL" sz="1600" dirty="0"/>
+              <a:rPr lang="en-IL" sz="1600" b="1" dirty="0"/>
               <a:t>User initial input</a:t>
             </a:r>
           </a:p>
@@ -33836,7 +33836,7 @@
         </p:nvSpPr>
         <p:spPr>
           <a:xfrm>
-            <a:off x="4644305" y="1519312"/>
+            <a:off x="4644305" y="1969253"/>
             <a:ext cx="2264898" cy="829993"/>
           </a:xfrm>
           <a:prstGeom prst="rect">
@@ -33905,7 +33905,7 @@
         </p:nvSpPr>
         <p:spPr>
           <a:xfrm flipH="1">
-            <a:off x="5731035" y="1658673"/>
+            <a:off x="5731035" y="2108614"/>
             <a:ext cx="45719" cy="84080"/>
           </a:xfrm>
           <a:prstGeom prst="rect">
@@ -33932,14 +33932,14 @@
               <a:buNone/>
             </a:pPr>
             <a:r>
-              <a:rPr lang="en-IL" sz="1600" dirty="0"/>
+              <a:rPr lang="en-IL" sz="1600" b="1" dirty="0"/>
               <a:t>Classifier template:</a:t>
             </a:r>
             <a:br>
-              <a:rPr lang="en-IL" sz="1600" dirty="0"/>
+              <a:rPr lang="en-IL" sz="1600" b="1" dirty="0"/>
             </a:br>
             <a:r>
-              <a:rPr lang="en-IL" sz="1600" dirty="0"/>
+              <a:rPr lang="en-IL" sz="1600" b="1" dirty="0"/>
               <a:t>understand intention</a:t>
             </a:r>
           </a:p>
@@ -33959,7 +33959,7 @@
         </p:nvSpPr>
         <p:spPr>
           <a:xfrm>
-            <a:off x="4387653" y="3094893"/>
+            <a:off x="4387653" y="3544834"/>
             <a:ext cx="2771332" cy="1950155"/>
           </a:xfrm>
           <a:prstGeom prst="diamond">
@@ -34028,7 +34028,7 @@
         </p:nvSpPr>
         <p:spPr>
           <a:xfrm>
-            <a:off x="5725942" y="3896750"/>
+            <a:off x="5725942" y="4346691"/>
             <a:ext cx="94755" cy="182881"/>
           </a:xfrm>
           <a:prstGeom prst="rect">
@@ -34055,14 +34055,14 @@
               <a:buNone/>
             </a:pPr>
             <a:r>
-              <a:rPr lang="en-IL" sz="1600" dirty="0"/>
+              <a:rPr lang="en-IL" sz="1600" b="1" dirty="0"/>
               <a:t>Determine the “stream”</a:t>
             </a:r>
             <a:br>
-              <a:rPr lang="en-IL" sz="1600" dirty="0"/>
+              <a:rPr lang="en-IL" sz="1600" b="1" dirty="0"/>
             </a:br>
             <a:r>
-              <a:rPr lang="en-IL" sz="1600" dirty="0"/>
+              <a:rPr lang="en-IL" sz="1600" b="1" dirty="0"/>
               <a:t>for this request</a:t>
             </a:r>
           </a:p>
@@ -34082,8 +34082,8 @@
         </p:nvSpPr>
         <p:spPr>
           <a:xfrm>
-            <a:off x="9493347" y="3650568"/>
-            <a:ext cx="2264898" cy="829993"/>
+            <a:off x="9442494" y="4064512"/>
+            <a:ext cx="2264898" cy="936334"/>
           </a:xfrm>
           <a:prstGeom prst="rect">
             <a:avLst/>
@@ -34151,7 +34151,7 @@
         </p:nvSpPr>
         <p:spPr>
           <a:xfrm flipH="1">
-            <a:off x="10574943" y="3819376"/>
+            <a:off x="10574943" y="4152359"/>
             <a:ext cx="50853" cy="94959"/>
           </a:xfrm>
           <a:prstGeom prst="rect">
@@ -34178,15 +34178,22 @@
               <a:buNone/>
             </a:pPr>
             <a:r>
-              <a:rPr lang="en-IL" sz="1600" dirty="0"/>
+              <a:rPr lang="en-IL" sz="1600" b="1" dirty="0"/>
               <a:t>QA template:</a:t>
             </a:r>
             <a:br>
-              <a:rPr lang="en-IL" sz="1600" dirty="0"/>
+              <a:rPr lang="en-IL" sz="1600" b="1" dirty="0"/>
             </a:br>
             <a:r>
-              <a:rPr lang="en-IL" sz="1600" dirty="0"/>
-              <a:t>get issue # </a:t>
+              <a:rPr lang="en-IL" sz="1600" b="1" dirty="0"/>
+              <a:t>get status of</a:t>
+            </a:r>
+            <a:br>
+              <a:rPr lang="en-IL" sz="1600" b="1" dirty="0"/>
+            </a:br>
+            <a:r>
+              <a:rPr lang="en-IL" sz="1600" b="1" dirty="0"/>
+              <a:t>customer QA issue</a:t>
             </a:r>
           </a:p>
         </p:txBody>
@@ -34205,7 +34212,7 @@
         </p:nvSpPr>
         <p:spPr>
           <a:xfrm>
-            <a:off x="276659" y="3587264"/>
+            <a:off x="276659" y="4037205"/>
             <a:ext cx="2264898" cy="963636"/>
           </a:xfrm>
           <a:prstGeom prst="rect">
@@ -34274,7 +34281,7 @@
         </p:nvSpPr>
         <p:spPr>
           <a:xfrm>
-            <a:off x="1350497" y="4065565"/>
+            <a:off x="1350497" y="4515506"/>
             <a:ext cx="0" cy="0"/>
           </a:xfrm>
           <a:prstGeom prst="rect">
@@ -34301,22 +34308,22 @@
               <a:buNone/>
             </a:pPr>
             <a:r>
-              <a:rPr lang="en-IL" sz="1600" dirty="0"/>
+              <a:rPr lang="en-IL" sz="1600" b="1" dirty="0"/>
               <a:t>Customer support</a:t>
             </a:r>
             <a:br>
-              <a:rPr lang="en-IL" sz="1600" dirty="0"/>
+              <a:rPr lang="en-IL" sz="1600" b="1" dirty="0"/>
             </a:br>
             <a:r>
-              <a:rPr lang="en-IL" sz="1600" dirty="0"/>
-              <a:t>template: get</a:t>
+              <a:rPr lang="en-IL" sz="1600" b="1" dirty="0"/>
+              <a:t>template: find solution</a:t>
             </a:r>
             <a:br>
-              <a:rPr lang="en-IL" sz="1600" dirty="0"/>
+              <a:rPr lang="en-IL" sz="1600" b="1" dirty="0"/>
             </a:br>
             <a:r>
-              <a:rPr lang="en-IL" sz="1600" dirty="0"/>
-              <a:t>description of problem</a:t>
+              <a:rPr lang="en-IL" sz="1600" b="1" dirty="0"/>
+              <a:t>to user’s issue</a:t>
             </a:r>
           </a:p>
         </p:txBody>
@@ -34335,7 +34342,7 @@
         </p:nvSpPr>
         <p:spPr>
           <a:xfrm>
-            <a:off x="11254154" y="3938953"/>
+            <a:off x="11254154" y="4271936"/>
             <a:ext cx="0" cy="0"/>
           </a:xfrm>
           <a:prstGeom prst="rect">
@@ -34382,7 +34389,7 @@
         </p:nvSpPr>
         <p:spPr>
           <a:xfrm>
-            <a:off x="559497" y="5016912"/>
+            <a:off x="559497" y="5466853"/>
             <a:ext cx="1702676" cy="884611"/>
           </a:xfrm>
           <a:prstGeom prst="ellipse">
@@ -34451,7 +34458,7 @@
         </p:nvSpPr>
         <p:spPr>
           <a:xfrm>
-            <a:off x="1340879" y="5435834"/>
+            <a:off x="1340879" y="5885775"/>
             <a:ext cx="126124" cy="45719"/>
           </a:xfrm>
           <a:prstGeom prst="rect">
@@ -34478,14 +34485,14 @@
               <a:buNone/>
             </a:pPr>
             <a:r>
-              <a:rPr lang="en-IL" sz="1600" dirty="0"/>
+              <a:rPr lang="en-IL" sz="1600" b="1" dirty="0"/>
               <a:t>Suggest fix</a:t>
             </a:r>
             <a:br>
-              <a:rPr lang="en-IL" sz="1600" dirty="0"/>
+              <a:rPr lang="en-IL" sz="1600" b="1" dirty="0"/>
             </a:br>
             <a:r>
-              <a:rPr lang="en-IL" sz="1600" dirty="0"/>
+              <a:rPr lang="en-IL" sz="1600" b="1" dirty="0"/>
               <a:t>for problem</a:t>
             </a:r>
           </a:p>
@@ -34505,7 +34512,7 @@
         </p:nvSpPr>
         <p:spPr>
           <a:xfrm>
-            <a:off x="9786667" y="5016912"/>
+            <a:off x="9786667" y="5466853"/>
             <a:ext cx="1702676" cy="842407"/>
           </a:xfrm>
           <a:prstGeom prst="ellipse">
@@ -34574,7 +34581,7 @@
         </p:nvSpPr>
         <p:spPr>
           <a:xfrm>
-            <a:off x="10574943" y="5421766"/>
+            <a:off x="10574943" y="5871707"/>
             <a:ext cx="126124" cy="45719"/>
           </a:xfrm>
           <a:prstGeom prst="rect">
@@ -34601,64 +34608,19 @@
               <a:buNone/>
             </a:pPr>
             <a:r>
-              <a:rPr lang="en-IL" sz="1600" dirty="0"/>
+              <a:rPr lang="en-IL" sz="1600" b="1" dirty="0"/>
               <a:t>Return status</a:t>
             </a:r>
             <a:br>
-              <a:rPr lang="en-IL" sz="1600" dirty="0"/>
+              <a:rPr lang="en-IL" sz="1600" b="1" dirty="0"/>
             </a:br>
             <a:r>
-              <a:rPr lang="en-IL" sz="1600" dirty="0"/>
+              <a:rPr lang="en-IL" sz="1600" b="1" dirty="0"/>
               <a:t>of QA issue</a:t>
             </a:r>
           </a:p>
         </p:txBody>
       </p:sp>
-      <p:cxnSp>
-        <p:nvCxnSpPr>
-          <p:cNvPr id="21" name="Straight Arrow Connector 20">
-            <a:extLst>
-              <a:ext uri="{FF2B5EF4-FFF2-40B4-BE49-F238E27FC236}">
-                <a16:creationId xmlns:a16="http://schemas.microsoft.com/office/drawing/2014/main" id="{1E7169C2-4E56-1CDC-33DF-00F8C2F7513B}"/>
-              </a:ext>
-            </a:extLst>
-          </p:cNvPr>
-          <p:cNvCxnSpPr>
-            <a:cxnSpLocks/>
-          </p:cNvCxnSpPr>
-          <p:nvPr/>
-        </p:nvCxnSpPr>
-        <p:spPr>
-          <a:xfrm>
-            <a:off x="5787387" y="1082888"/>
-            <a:ext cx="0" cy="436424"/>
-          </a:xfrm>
-          <a:prstGeom prst="straightConnector1">
-            <a:avLst/>
-          </a:prstGeom>
-          <a:ln w="0" cap="flat">
-            <a:solidFill>
-              <a:schemeClr val="tx1"/>
-            </a:solidFill>
-            <a:miter lim="800000"/>
-            <a:tailEnd type="triangle"/>
-          </a:ln>
-        </p:spPr>
-        <p:style>
-          <a:lnRef idx="1">
-            <a:schemeClr val="accent1"/>
-          </a:lnRef>
-          <a:fillRef idx="0">
-            <a:schemeClr val="accent1"/>
-          </a:fillRef>
-          <a:effectRef idx="0">
-            <a:schemeClr val="accent1"/>
-          </a:effectRef>
-          <a:fontRef idx="minor">
-            <a:schemeClr val="tx1"/>
-          </a:fontRef>
-        </p:style>
-      </p:cxnSp>
       <p:cxnSp>
         <p:nvCxnSpPr>
           <p:cNvPr id="22" name="Straight Arrow Connector 21">
@@ -34676,13 +34638,13 @@
         </p:nvCxnSpPr>
         <p:spPr>
           <a:xfrm>
-            <a:off x="5763699" y="2349305"/>
+            <a:off x="5763699" y="2799246"/>
             <a:ext cx="9620" cy="745588"/>
           </a:xfrm>
           <a:prstGeom prst="straightConnector1">
             <a:avLst/>
           </a:prstGeom>
-          <a:ln w="0" cap="flat">
+          <a:ln w="15875" cap="flat">
             <a:solidFill>
               <a:schemeClr val="tx1"/>
             </a:solidFill>
@@ -34722,14 +34684,14 @@
           <p:nvPr/>
         </p:nvCxnSpPr>
         <p:spPr>
-          <a:xfrm flipV="1">
-            <a:off x="7158985" y="4065565"/>
-            <a:ext cx="2334362" cy="4406"/>
+          <a:xfrm>
+            <a:off x="7158985" y="4519912"/>
+            <a:ext cx="2283509" cy="12767"/>
           </a:xfrm>
           <a:prstGeom prst="straightConnector1">
             <a:avLst/>
           </a:prstGeom>
-          <a:ln w="0" cap="flat">
+          <a:ln w="15875" cap="flat">
             <a:solidFill>
               <a:schemeClr val="tx1"/>
             </a:solidFill>
@@ -34770,13 +34732,13 @@
         </p:nvCxnSpPr>
         <p:spPr>
           <a:xfrm flipH="1" flipV="1">
-            <a:off x="2541557" y="4069082"/>
+            <a:off x="2541557" y="4519023"/>
             <a:ext cx="1846096" cy="889"/>
           </a:xfrm>
           <a:prstGeom prst="straightConnector1">
             <a:avLst/>
           </a:prstGeom>
-          <a:ln w="0" cap="flat">
+          <a:ln w="15875" cap="flat">
             <a:solidFill>
               <a:schemeClr val="tx1"/>
             </a:solidFill>
@@ -34815,13 +34777,13 @@
         </p:nvCxnSpPr>
         <p:spPr>
           <a:xfrm>
-            <a:off x="1409113" y="4580488"/>
+            <a:off x="1409113" y="5030429"/>
             <a:ext cx="0" cy="436424"/>
           </a:xfrm>
           <a:prstGeom prst="straightConnector1">
             <a:avLst/>
           </a:prstGeom>
-          <a:ln w="0" cap="flat">
+          <a:ln w="15875" cap="flat">
             <a:solidFill>
               <a:schemeClr val="tx1"/>
             </a:solidFill>
@@ -34861,13 +34823,13 @@
         </p:nvCxnSpPr>
         <p:spPr>
           <a:xfrm>
-            <a:off x="10625796" y="4480561"/>
-            <a:ext cx="12209" cy="500519"/>
+            <a:off x="10574943" y="5000846"/>
+            <a:ext cx="12209" cy="457482"/>
           </a:xfrm>
           <a:prstGeom prst="straightConnector1">
             <a:avLst/>
           </a:prstGeom>
-          <a:ln w="0" cap="flat">
+          <a:ln w="15875" cap="flat">
             <a:solidFill>
               <a:schemeClr val="tx1"/>
             </a:solidFill>
@@ -34904,8 +34866,8 @@
         </p:nvSpPr>
         <p:spPr>
           <a:xfrm>
-            <a:off x="6815989" y="3459187"/>
-            <a:ext cx="2820886" cy="215444"/>
+            <a:off x="6641820" y="3778502"/>
+            <a:ext cx="2960983" cy="246221"/>
           </a:xfrm>
           <a:prstGeom prst="rect">
             <a:avLst/>
@@ -35068,10 +35030,10 @@
           </a:lstStyle>
           <a:p>
             <a:r>
-              <a:rPr lang="en-US" sz="1400" dirty="0"/>
-              <a:t>Request for status of QA request</a:t>
+              <a:rPr lang="en-US" dirty="0"/>
+              <a:t>Customer wants QA issue status</a:t>
             </a:r>
-            <a:endParaRPr lang="en-IL" sz="1400" dirty="0"/>
+            <a:endParaRPr lang="en-IL" dirty="0"/>
           </a:p>
         </p:txBody>
       </p:sp>
@@ -35089,7 +35051,7 @@
         </p:nvSpPr>
         <p:spPr>
           <a:xfrm>
-            <a:off x="11296357" y="4121832"/>
+            <a:off x="11296357" y="4454815"/>
             <a:ext cx="0" cy="0"/>
           </a:xfrm>
           <a:prstGeom prst="rect">
@@ -35133,8 +35095,8 @@
         </p:nvSpPr>
         <p:spPr>
           <a:xfrm>
-            <a:off x="2710066" y="3399122"/>
-            <a:ext cx="1944872" cy="215444"/>
+            <a:off x="2589196" y="3754217"/>
+            <a:ext cx="2264898" cy="246221"/>
           </a:xfrm>
           <a:prstGeom prst="rect">
             <a:avLst/>
@@ -35297,13 +35259,281 @@
           </a:lstStyle>
           <a:p>
             <a:r>
-              <a:rPr lang="en-US" sz="1400" dirty="0"/>
+              <a:rPr lang="en-US" dirty="0"/>
               <a:t>Customer has a problem</a:t>
             </a:r>
-            <a:endParaRPr lang="en-IL" sz="1400" dirty="0"/>
+            <a:endParaRPr lang="en-IL" dirty="0"/>
           </a:p>
         </p:txBody>
       </p:sp>
+      <p:sp>
+        <p:nvSpPr>
+          <p:cNvPr id="33" name="Oval Callout 32">
+            <a:extLst>
+              <a:ext uri="{FF2B5EF4-FFF2-40B4-BE49-F238E27FC236}">
+                <a16:creationId xmlns:a16="http://schemas.microsoft.com/office/drawing/2014/main" id="{8BC626F0-37BC-2BEC-976C-9B4F608F9D5D}"/>
+              </a:ext>
+            </a:extLst>
+          </p:cNvPr>
+          <p:cNvSpPr/>
+          <p:nvPr/>
+        </p:nvSpPr>
+        <p:spPr>
+          <a:xfrm>
+            <a:off x="177567" y="2079587"/>
+            <a:ext cx="2177143" cy="1612063"/>
+          </a:xfrm>
+          <a:prstGeom prst="wedgeEllipseCallout">
+            <a:avLst/>
+          </a:prstGeom>
+          <a:solidFill>
+            <a:schemeClr val="bg1">
+              <a:lumMod val="85000"/>
+            </a:schemeClr>
+          </a:solidFill>
+          <a:ln w="6350" cap="sq">
+            <a:noFill/>
+            <a:miter lim="800000"/>
+          </a:ln>
+        </p:spPr>
+        <p:style>
+          <a:lnRef idx="2">
+            <a:schemeClr val="accent1">
+              <a:shade val="50000"/>
+            </a:schemeClr>
+          </a:lnRef>
+          <a:fillRef idx="1">
+            <a:schemeClr val="accent1"/>
+          </a:fillRef>
+          <a:effectRef idx="0">
+            <a:schemeClr val="accent1"/>
+          </a:effectRef>
+          <a:fontRef idx="minor">
+            <a:schemeClr val="lt1"/>
+          </a:fontRef>
+        </p:style>
+        <p:txBody>
+          <a:bodyPr rot="0" spcFirstLastPara="0" vertOverflow="overflow" horzOverflow="overflow" vert="horz" wrap="square" lIns="91440" tIns="45720" rIns="91440" bIns="45720" numCol="1" spcCol="0" rtlCol="0" fromWordArt="0" anchor="ctr" anchorCtr="0" forceAA="0" compatLnSpc="1">
+            <a:prstTxWarp prst="textNoShape">
+              <a:avLst/>
+            </a:prstTxWarp>
+            <a:noAutofit/>
+          </a:bodyPr>
+          <a:lstStyle/>
+          <a:p>
+            <a:pPr algn="ctr">
+              <a:spcBef>
+                <a:spcPts val="300"/>
+              </a:spcBef>
+              <a:spcAft>
+                <a:spcPts val="300"/>
+              </a:spcAft>
+            </a:pPr>
+            <a:r>
+              <a:rPr lang="en-IL" sz="1600" dirty="0">
+                <a:solidFill>
+                  <a:schemeClr val="tx1"/>
+                </a:solidFill>
+              </a:rPr>
+              <a:t>LLM prompt artifact Y with specific LLM call</a:t>
+            </a:r>
+          </a:p>
+        </p:txBody>
+      </p:sp>
+      <p:sp>
+        <p:nvSpPr>
+          <p:cNvPr id="34" name="Oval Callout 33">
+            <a:extLst>
+              <a:ext uri="{FF2B5EF4-FFF2-40B4-BE49-F238E27FC236}">
+                <a16:creationId xmlns:a16="http://schemas.microsoft.com/office/drawing/2014/main" id="{E420BB84-632E-19F2-8543-40E5226FD7FE}"/>
+              </a:ext>
+            </a:extLst>
+          </p:cNvPr>
+          <p:cNvSpPr/>
+          <p:nvPr/>
+        </p:nvSpPr>
+        <p:spPr>
+          <a:xfrm>
+            <a:off x="5780135" y="53369"/>
+            <a:ext cx="2177143" cy="1612063"/>
+          </a:xfrm>
+          <a:prstGeom prst="wedgeEllipseCallout">
+            <a:avLst/>
+          </a:prstGeom>
+          <a:solidFill>
+            <a:schemeClr val="bg1">
+              <a:lumMod val="85000"/>
+            </a:schemeClr>
+          </a:solidFill>
+          <a:ln w="6350" cap="sq">
+            <a:noFill/>
+            <a:miter lim="800000"/>
+          </a:ln>
+        </p:spPr>
+        <p:style>
+          <a:lnRef idx="2">
+            <a:schemeClr val="accent1">
+              <a:shade val="50000"/>
+            </a:schemeClr>
+          </a:lnRef>
+          <a:fillRef idx="1">
+            <a:schemeClr val="accent1"/>
+          </a:fillRef>
+          <a:effectRef idx="0">
+            <a:schemeClr val="accent1"/>
+          </a:effectRef>
+          <a:fontRef idx="minor">
+            <a:schemeClr val="lt1"/>
+          </a:fontRef>
+        </p:style>
+        <p:txBody>
+          <a:bodyPr rot="0" spcFirstLastPara="0" vertOverflow="overflow" horzOverflow="overflow" vert="horz" wrap="square" lIns="91440" tIns="45720" rIns="91440" bIns="45720" numCol="1" spcCol="0" rtlCol="0" fromWordArt="0" anchor="ctr" anchorCtr="0" forceAA="0" compatLnSpc="1">
+            <a:prstTxWarp prst="textNoShape">
+              <a:avLst/>
+            </a:prstTxWarp>
+            <a:noAutofit/>
+          </a:bodyPr>
+          <a:lstStyle/>
+          <a:p>
+            <a:pPr algn="ctr">
+              <a:spcBef>
+                <a:spcPts val="300"/>
+              </a:spcBef>
+              <a:spcAft>
+                <a:spcPts val="300"/>
+              </a:spcAft>
+            </a:pPr>
+            <a:r>
+              <a:rPr lang="en-IL" sz="1600" dirty="0">
+                <a:solidFill>
+                  <a:schemeClr val="tx1"/>
+                </a:solidFill>
+              </a:rPr>
+              <a:t>LLM prompt artifact X with specific LLM call</a:t>
+            </a:r>
+          </a:p>
+        </p:txBody>
+      </p:sp>
+      <p:sp>
+        <p:nvSpPr>
+          <p:cNvPr id="38" name="Oval Callout 37">
+            <a:extLst>
+              <a:ext uri="{FF2B5EF4-FFF2-40B4-BE49-F238E27FC236}">
+                <a16:creationId xmlns:a16="http://schemas.microsoft.com/office/drawing/2014/main" id="{7A1B19EE-CABD-83E9-D208-8A140DE65FD7}"/>
+              </a:ext>
+            </a:extLst>
+          </p:cNvPr>
+          <p:cNvSpPr/>
+          <p:nvPr/>
+        </p:nvSpPr>
+        <p:spPr>
+          <a:xfrm>
+            <a:off x="10014857" y="2148462"/>
+            <a:ext cx="2177143" cy="1612063"/>
+          </a:xfrm>
+          <a:prstGeom prst="wedgeEllipseCallout">
+            <a:avLst/>
+          </a:prstGeom>
+          <a:solidFill>
+            <a:schemeClr val="bg1">
+              <a:lumMod val="85000"/>
+            </a:schemeClr>
+          </a:solidFill>
+          <a:ln w="6350" cap="sq">
+            <a:noFill/>
+            <a:miter lim="800000"/>
+          </a:ln>
+        </p:spPr>
+        <p:style>
+          <a:lnRef idx="2">
+            <a:schemeClr val="accent1">
+              <a:shade val="50000"/>
+            </a:schemeClr>
+          </a:lnRef>
+          <a:fillRef idx="1">
+            <a:schemeClr val="accent1"/>
+          </a:fillRef>
+          <a:effectRef idx="0">
+            <a:schemeClr val="accent1"/>
+          </a:effectRef>
+          <a:fontRef idx="minor">
+            <a:schemeClr val="lt1"/>
+          </a:fontRef>
+        </p:style>
+        <p:txBody>
+          <a:bodyPr rot="0" spcFirstLastPara="0" vertOverflow="overflow" horzOverflow="overflow" vert="horz" wrap="square" lIns="91440" tIns="45720" rIns="91440" bIns="45720" numCol="1" spcCol="0" rtlCol="0" fromWordArt="0" anchor="ctr" anchorCtr="0" forceAA="0" compatLnSpc="1">
+            <a:prstTxWarp prst="textNoShape">
+              <a:avLst/>
+            </a:prstTxWarp>
+            <a:noAutofit/>
+          </a:bodyPr>
+          <a:lstStyle/>
+          <a:p>
+            <a:pPr algn="ctr">
+              <a:spcBef>
+                <a:spcPts val="300"/>
+              </a:spcBef>
+              <a:spcAft>
+                <a:spcPts val="300"/>
+              </a:spcAft>
+            </a:pPr>
+            <a:r>
+              <a:rPr lang="en-IL" sz="1600" dirty="0">
+                <a:solidFill>
+                  <a:schemeClr val="tx1"/>
+                </a:solidFill>
+              </a:rPr>
+              <a:t>LLM prompt artifact Z with specific LLM call</a:t>
+            </a:r>
+          </a:p>
+        </p:txBody>
+      </p:sp>
+      <p:cxnSp>
+        <p:nvCxnSpPr>
+          <p:cNvPr id="40" name="Elbow Connector 39">
+            <a:extLst>
+              <a:ext uri="{FF2B5EF4-FFF2-40B4-BE49-F238E27FC236}">
+                <a16:creationId xmlns:a16="http://schemas.microsoft.com/office/drawing/2014/main" id="{7EE87C45-4BEE-9EDD-E271-6527E7CAA3D2}"/>
+              </a:ext>
+            </a:extLst>
+          </p:cNvPr>
+          <p:cNvCxnSpPr>
+            <a:stCxn id="3" idx="4"/>
+            <a:endCxn id="7" idx="1"/>
+          </p:cNvCxnSpPr>
+          <p:nvPr/>
+        </p:nvCxnSpPr>
+        <p:spPr>
+          <a:xfrm rot="16200000" flipH="1">
+            <a:off x="3745290" y="1485234"/>
+            <a:ext cx="546621" cy="1251410"/>
+          </a:xfrm>
+          <a:prstGeom prst="bentConnector2">
+            <a:avLst/>
+          </a:prstGeom>
+          <a:ln w="15875" cap="flat">
+            <a:solidFill>
+              <a:schemeClr val="tx1"/>
+            </a:solidFill>
+            <a:miter lim="800000"/>
+            <a:tailEnd type="triangle"/>
+          </a:ln>
+        </p:spPr>
+        <p:style>
+          <a:lnRef idx="1">
+            <a:schemeClr val="accent1"/>
+          </a:lnRef>
+          <a:fillRef idx="0">
+            <a:schemeClr val="accent1"/>
+          </a:fillRef>
+          <a:effectRef idx="0">
+            <a:schemeClr val="accent1"/>
+          </a:effectRef>
+          <a:fontRef idx="minor">
+            <a:schemeClr val="tx1"/>
+          </a:fontRef>
+        </p:style>
+      </p:cxnSp>
     </p:spTree>
     <p:extLst>
       <p:ext uri="{BB962C8B-B14F-4D97-AF65-F5344CB8AC3E}">
